--- a/Decorators.pptx
+++ b/Decorators.pptx
@@ -12,6 +12,12 @@
     <p:sldId id="258" r:id="rId6"/>
     <p:sldId id="259" r:id="rId7"/>
     <p:sldId id="262" r:id="rId8"/>
+    <p:sldId id="263" r:id="rId9"/>
+    <p:sldId id="264" r:id="rId10"/>
+    <p:sldId id="265" r:id="rId11"/>
+    <p:sldId id="267" r:id="rId12"/>
+    <p:sldId id="266" r:id="rId13"/>
+    <p:sldId id="268" r:id="rId14"/>
   </p:sldIdLst>
   <p:sldSz cx="12192000" cy="6858000"/>
   <p:notesSz cx="6858000" cy="9144000"/>
@@ -110,7 +116,21 @@
       </a:defRPr>
     </a:lvl9pPr>
   </p:defaultTextStyle>
+  <p:extLst>
+    <p:ext uri="{EFAFB233-063F-42B5-8137-9DF3F51BA10A}">
+      <p15:sldGuideLst xmlns:p15="http://schemas.microsoft.com/office/powerpoint/2012/main"/>
+    </p:ext>
+  </p:extLst>
 </p:presentation>
+</file>
+
+<file path=ppt/revisionInfo.xml><?xml version="1.0" encoding="utf-8"?>
+<p1510:revInfo xmlns:a="http://schemas.openxmlformats.org/drawingml/2006/main" xmlns:r="http://schemas.openxmlformats.org/officeDocument/2006/relationships" xmlns:p1510="http://schemas.microsoft.com/office/powerpoint/2015/10/main">
+  <p1510:revLst>
+    <p1510:client id="{06891019-9950-3F47-E9C4-EBC56D86B472}" v="563" dt="2026-03-12T08:40:48.966"/>
+    <p1510:client id="{22B3D1E0-68DD-25CD-1753-096CDEB58CC0}" v="1416" dt="2026-03-11T23:12:40.821"/>
+  </p1510:revLst>
+</p1510:revInfo>
 </file>
 
 <file path=ppt/ink/ink1.xml><?xml version="1.0" encoding="utf-8"?>
@@ -424,7 +444,7 @@
           <a:p>
             <a:fld id="{03C1A0E1-1193-4243-A79A-EFA4F6B3219D}" type="datetimeFigureOut">
               <a:rPr lang="en-GB" smtClean="0"/>
-              <a:t>10/03/2026</a:t>
+              <a:t>12/03/2026</a:t>
             </a:fld>
             <a:endParaRPr lang="en-GB"/>
           </a:p>
@@ -624,7 +644,7 @@
           <a:p>
             <a:fld id="{03C1A0E1-1193-4243-A79A-EFA4F6B3219D}" type="datetimeFigureOut">
               <a:rPr lang="en-GB" smtClean="0"/>
-              <a:t>10/03/2026</a:t>
+              <a:t>12/03/2026</a:t>
             </a:fld>
             <a:endParaRPr lang="en-GB"/>
           </a:p>
@@ -834,7 +854,7 @@
           <a:p>
             <a:fld id="{03C1A0E1-1193-4243-A79A-EFA4F6B3219D}" type="datetimeFigureOut">
               <a:rPr lang="en-GB" smtClean="0"/>
-              <a:t>10/03/2026</a:t>
+              <a:t>12/03/2026</a:t>
             </a:fld>
             <a:endParaRPr lang="en-GB"/>
           </a:p>
@@ -1034,7 +1054,7 @@
           <a:p>
             <a:fld id="{03C1A0E1-1193-4243-A79A-EFA4F6B3219D}" type="datetimeFigureOut">
               <a:rPr lang="en-GB" smtClean="0"/>
-              <a:t>10/03/2026</a:t>
+              <a:t>12/03/2026</a:t>
             </a:fld>
             <a:endParaRPr lang="en-GB"/>
           </a:p>
@@ -1310,7 +1330,7 @@
           <a:p>
             <a:fld id="{03C1A0E1-1193-4243-A79A-EFA4F6B3219D}" type="datetimeFigureOut">
               <a:rPr lang="en-GB" smtClean="0"/>
-              <a:t>10/03/2026</a:t>
+              <a:t>12/03/2026</a:t>
             </a:fld>
             <a:endParaRPr lang="en-GB"/>
           </a:p>
@@ -1578,7 +1598,7 @@
           <a:p>
             <a:fld id="{03C1A0E1-1193-4243-A79A-EFA4F6B3219D}" type="datetimeFigureOut">
               <a:rPr lang="en-GB" smtClean="0"/>
-              <a:t>10/03/2026</a:t>
+              <a:t>12/03/2026</a:t>
             </a:fld>
             <a:endParaRPr lang="en-GB"/>
           </a:p>
@@ -1993,7 +2013,7 @@
           <a:p>
             <a:fld id="{03C1A0E1-1193-4243-A79A-EFA4F6B3219D}" type="datetimeFigureOut">
               <a:rPr lang="en-GB" smtClean="0"/>
-              <a:t>10/03/2026</a:t>
+              <a:t>12/03/2026</a:t>
             </a:fld>
             <a:endParaRPr lang="en-GB"/>
           </a:p>
@@ -2135,7 +2155,7 @@
           <a:p>
             <a:fld id="{03C1A0E1-1193-4243-A79A-EFA4F6B3219D}" type="datetimeFigureOut">
               <a:rPr lang="en-GB" smtClean="0"/>
-              <a:t>10/03/2026</a:t>
+              <a:t>12/03/2026</a:t>
             </a:fld>
             <a:endParaRPr lang="en-GB"/>
           </a:p>
@@ -2248,7 +2268,7 @@
           <a:p>
             <a:fld id="{03C1A0E1-1193-4243-A79A-EFA4F6B3219D}" type="datetimeFigureOut">
               <a:rPr lang="en-GB" smtClean="0"/>
-              <a:t>10/03/2026</a:t>
+              <a:t>12/03/2026</a:t>
             </a:fld>
             <a:endParaRPr lang="en-GB"/>
           </a:p>
@@ -2561,7 +2581,7 @@
           <a:p>
             <a:fld id="{03C1A0E1-1193-4243-A79A-EFA4F6B3219D}" type="datetimeFigureOut">
               <a:rPr lang="en-GB" smtClean="0"/>
-              <a:t>10/03/2026</a:t>
+              <a:t>12/03/2026</a:t>
             </a:fld>
             <a:endParaRPr lang="en-GB"/>
           </a:p>
@@ -2850,7 +2870,7 @@
           <a:p>
             <a:fld id="{03C1A0E1-1193-4243-A79A-EFA4F6B3219D}" type="datetimeFigureOut">
               <a:rPr lang="en-GB" smtClean="0"/>
-              <a:t>10/03/2026</a:t>
+              <a:t>12/03/2026</a:t>
             </a:fld>
             <a:endParaRPr lang="en-GB"/>
           </a:p>
@@ -3093,7 +3113,7 @@
           <a:p>
             <a:fld id="{03C1A0E1-1193-4243-A79A-EFA4F6B3219D}" type="datetimeFigureOut">
               <a:rPr lang="en-GB" smtClean="0"/>
-              <a:t>10/03/2026</a:t>
+              <a:t>12/03/2026</a:t>
             </a:fld>
             <a:endParaRPr lang="en-GB"/>
           </a:p>
@@ -3672,8 +3692,8 @@
           </a:p>
         </p:txBody>
       </p:sp>
-      <mc:AlternateContent xmlns:mc="http://schemas.openxmlformats.org/markup-compatibility/2006">
-        <mc:Choice xmlns:p14="http://schemas.microsoft.com/office/powerpoint/2010/main" Requires="p14">
+      <mc:AlternateContent xmlns:mc="http://schemas.openxmlformats.org/markup-compatibility/2006" xmlns:p14="http://schemas.microsoft.com/office/powerpoint/2010/main">
+        <mc:Choice Requires="p14">
           <p:contentPart p14:bwMode="auto" r:id="rId2">
             <p14:nvContentPartPr>
               <p14:cNvPr id="6" name="Ink 5">
@@ -3692,7 +3712,7 @@
             </p14:xfrm>
           </p:contentPart>
         </mc:Choice>
-        <mc:Fallback>
+        <mc:Fallback xmlns="">
           <p:pic>
             <p:nvPicPr>
               <p:cNvPr id="6" name="Ink 5">
@@ -3723,8 +3743,8 @@
           </p:pic>
         </mc:Fallback>
       </mc:AlternateContent>
-      <mc:AlternateContent xmlns:mc="http://schemas.openxmlformats.org/markup-compatibility/2006">
-        <mc:Choice xmlns:p14="http://schemas.microsoft.com/office/powerpoint/2010/main" Requires="p14">
+      <mc:AlternateContent xmlns:mc="http://schemas.openxmlformats.org/markup-compatibility/2006" xmlns:p14="http://schemas.microsoft.com/office/powerpoint/2010/main">
+        <mc:Choice Requires="p14">
           <p:contentPart p14:bwMode="auto" r:id="rId4">
             <p14:nvContentPartPr>
               <p14:cNvPr id="7" name="Ink 6">
@@ -3743,7 +3763,7 @@
             </p14:xfrm>
           </p:contentPart>
         </mc:Choice>
-        <mc:Fallback>
+        <mc:Fallback xmlns="">
           <p:pic>
             <p:nvPicPr>
               <p:cNvPr id="7" name="Ink 6">
@@ -3774,8 +3794,8 @@
           </p:pic>
         </mc:Fallback>
       </mc:AlternateContent>
-      <mc:AlternateContent xmlns:mc="http://schemas.openxmlformats.org/markup-compatibility/2006">
-        <mc:Choice xmlns:p14="http://schemas.microsoft.com/office/powerpoint/2010/main" Requires="p14">
+      <mc:AlternateContent xmlns:mc="http://schemas.openxmlformats.org/markup-compatibility/2006" xmlns:p14="http://schemas.microsoft.com/office/powerpoint/2010/main">
+        <mc:Choice Requires="p14">
           <p:contentPart p14:bwMode="auto" r:id="rId6">
             <p14:nvContentPartPr>
               <p14:cNvPr id="8" name="Ink 7">
@@ -3794,7 +3814,7 @@
             </p14:xfrm>
           </p:contentPart>
         </mc:Choice>
-        <mc:Fallback>
+        <mc:Fallback xmlns="">
           <p:pic>
             <p:nvPicPr>
               <p:cNvPr id="8" name="Ink 7">
@@ -3825,8 +3845,8 @@
           </p:pic>
         </mc:Fallback>
       </mc:AlternateContent>
-      <mc:AlternateContent xmlns:mc="http://schemas.openxmlformats.org/markup-compatibility/2006">
-        <mc:Choice xmlns:p14="http://schemas.microsoft.com/office/powerpoint/2010/main" Requires="p14">
+      <mc:AlternateContent xmlns:mc="http://schemas.openxmlformats.org/markup-compatibility/2006" xmlns:p14="http://schemas.microsoft.com/office/powerpoint/2010/main">
+        <mc:Choice Requires="p14">
           <p:contentPart p14:bwMode="auto" r:id="rId7">
             <p14:nvContentPartPr>
               <p14:cNvPr id="9" name="Ink 8">
@@ -3845,7 +3865,7 @@
             </p14:xfrm>
           </p:contentPart>
         </mc:Choice>
-        <mc:Fallback>
+        <mc:Fallback xmlns="">
           <p:pic>
             <p:nvPicPr>
               <p:cNvPr id="9" name="Ink 8">
@@ -3876,8 +3896,8 @@
           </p:pic>
         </mc:Fallback>
       </mc:AlternateContent>
-      <mc:AlternateContent xmlns:mc="http://schemas.openxmlformats.org/markup-compatibility/2006">
-        <mc:Choice xmlns:p14="http://schemas.microsoft.com/office/powerpoint/2010/main" Requires="p14">
+      <mc:AlternateContent xmlns:mc="http://schemas.openxmlformats.org/markup-compatibility/2006" xmlns:p14="http://schemas.microsoft.com/office/powerpoint/2010/main">
+        <mc:Choice Requires="p14">
           <p:contentPart p14:bwMode="auto" r:id="rId9">
             <p14:nvContentPartPr>
               <p14:cNvPr id="10" name="Ink 9">
@@ -3896,7 +3916,7 @@
             </p14:xfrm>
           </p:contentPart>
         </mc:Choice>
-        <mc:Fallback>
+        <mc:Fallback xmlns="">
           <p:pic>
             <p:nvPicPr>
               <p:cNvPr id="10" name="Ink 9">
@@ -3940,6 +3960,768 @@
 </p:sld>
 </file>
 
+<file path=ppt/slides/slide10.xml><?xml version="1.0" encoding="utf-8"?>
+<p:sld xmlns:a="http://schemas.openxmlformats.org/drawingml/2006/main" xmlns:r="http://schemas.openxmlformats.org/officeDocument/2006/relationships" xmlns:p="http://schemas.openxmlformats.org/presentationml/2006/main">
+  <p:cSld>
+    <p:spTree>
+      <p:nvGrpSpPr>
+        <p:cNvPr id="1" name=""/>
+        <p:cNvGrpSpPr/>
+        <p:nvPr/>
+      </p:nvGrpSpPr>
+      <p:grpSpPr>
+        <a:xfrm>
+          <a:off x="0" y="0"/>
+          <a:ext cx="0" cy="0"/>
+          <a:chOff x="0" y="0"/>
+          <a:chExt cx="0" cy="0"/>
+        </a:xfrm>
+      </p:grpSpPr>
+      <p:sp>
+        <p:nvSpPr>
+          <p:cNvPr id="5" name="Rectangle 4">
+            <a:extLst>
+              <a:ext uri="{FF2B5EF4-FFF2-40B4-BE49-F238E27FC236}">
+                <a16:creationId xmlns:a16="http://schemas.microsoft.com/office/drawing/2014/main" id="{DF3B7CD9-AC92-3F65-5A97-B4435F5E224E}"/>
+              </a:ext>
+            </a:extLst>
+          </p:cNvPr>
+          <p:cNvSpPr/>
+          <p:nvPr/>
+        </p:nvSpPr>
+        <p:spPr>
+          <a:xfrm>
+            <a:off x="0" y="0"/>
+            <a:ext cx="12192000" cy="6858000"/>
+          </a:xfrm>
+          <a:prstGeom prst="rect">
+            <a:avLst/>
+          </a:prstGeom>
+        </p:spPr>
+        <p:style>
+          <a:lnRef idx="0">
+            <a:schemeClr val="accent2"/>
+          </a:lnRef>
+          <a:fillRef idx="3">
+            <a:schemeClr val="accent2"/>
+          </a:fillRef>
+          <a:effectRef idx="3">
+            <a:schemeClr val="accent2"/>
+          </a:effectRef>
+          <a:fontRef idx="minor">
+            <a:schemeClr val="lt1"/>
+          </a:fontRef>
+        </p:style>
+        <p:txBody>
+          <a:bodyPr lIns="91440" tIns="45720" rIns="91440" bIns="45720" rtlCol="0" anchor="ctr"/>
+          <a:lstStyle/>
+          <a:p>
+            <a:pPr algn="ctr"/>
+            <a:endParaRPr lang="en-GB" dirty="0">
+              <a:ea typeface="Calibri"/>
+              <a:cs typeface="Calibri"/>
+            </a:endParaRPr>
+          </a:p>
+        </p:txBody>
+      </p:sp>
+      <p:pic>
+        <p:nvPicPr>
+          <p:cNvPr id="8" name="Content Placeholder 7" descr="A computer screen shot of text&#10;&#10;AI-generated content may be incorrect.">
+            <a:extLst>
+              <a:ext uri="{FF2B5EF4-FFF2-40B4-BE49-F238E27FC236}">
+                <a16:creationId xmlns:a16="http://schemas.microsoft.com/office/drawing/2014/main" id="{D96387F9-D440-F0D5-22E5-1861E3946CC9}"/>
+              </a:ext>
+            </a:extLst>
+          </p:cNvPr>
+          <p:cNvPicPr>
+            <a:picLocks noGrp="1" noChangeAspect="1"/>
+          </p:cNvPicPr>
+          <p:nvPr>
+            <p:ph idx="1"/>
+          </p:nvPr>
+        </p:nvPicPr>
+        <p:blipFill>
+          <a:blip r:embed="rId2"/>
+          <a:stretch>
+            <a:fillRect/>
+          </a:stretch>
+        </p:blipFill>
+        <p:spPr>
+          <a:xfrm>
+            <a:off x="185057" y="265554"/>
+            <a:ext cx="6586847" cy="6155297"/>
+          </a:xfrm>
+          <a:prstGeom prst="rect">
+            <a:avLst/>
+          </a:prstGeom>
+        </p:spPr>
+      </p:pic>
+      <p:sp>
+        <p:nvSpPr>
+          <p:cNvPr id="10" name="TextBox 9">
+            <a:extLst>
+              <a:ext uri="{FF2B5EF4-FFF2-40B4-BE49-F238E27FC236}">
+                <a16:creationId xmlns:a16="http://schemas.microsoft.com/office/drawing/2014/main" id="{BE34029C-3273-DE2E-B2E9-DF765E428438}"/>
+              </a:ext>
+            </a:extLst>
+          </p:cNvPr>
+          <p:cNvSpPr txBox="1"/>
+          <p:nvPr/>
+        </p:nvSpPr>
+        <p:spPr>
+          <a:xfrm>
+            <a:off x="7135091" y="494804"/>
+            <a:ext cx="4819402" cy="5693866"/>
+          </a:xfrm>
+          <a:prstGeom prst="rect">
+            <a:avLst/>
+          </a:prstGeom>
+          <a:noFill/>
+        </p:spPr>
+        <p:txBody>
+          <a:bodyPr rot="0" spcFirstLastPara="0" vertOverflow="overflow" horzOverflow="overflow" vert="horz" wrap="square" lIns="91440" tIns="45720" rIns="91440" bIns="45720" numCol="1" spcCol="0" rtlCol="0" fromWordArt="0" anchor="t" anchorCtr="0" forceAA="0" compatLnSpc="1">
+            <a:prstTxWarp prst="textNoShape">
+              <a:avLst/>
+            </a:prstTxWarp>
+            <a:spAutoFit/>
+          </a:bodyPr>
+          <a:lstStyle/>
+          <a:p>
+            <a:r>
+              <a:rPr lang="en-GB" sz="2800" dirty="0">
+                <a:ea typeface="Calibri"/>
+                <a:cs typeface="Calibri"/>
+              </a:rPr>
+              <a:t>Finaly we can create are decorator that we </a:t>
+            </a:r>
+            <a:r>
+              <a:rPr lang="en-GB" sz="2800">
+                <a:ea typeface="Calibri"/>
+                <a:cs typeface="Calibri"/>
+              </a:rPr>
+              <a:t>will be using to layer over are base.</a:t>
+            </a:r>
+            <a:endParaRPr lang="en-GB" sz="2800" dirty="0">
+              <a:ea typeface="Calibri"/>
+              <a:cs typeface="Calibri"/>
+            </a:endParaRPr>
+          </a:p>
+          <a:p>
+            <a:endParaRPr lang="en-GB" sz="2800" dirty="0">
+              <a:ea typeface="Calibri"/>
+              <a:cs typeface="Calibri"/>
+            </a:endParaRPr>
+          </a:p>
+          <a:p>
+            <a:r>
+              <a:rPr lang="en-GB" sz="2800" dirty="0">
+                <a:ea typeface="Calibri"/>
+                <a:cs typeface="Calibri"/>
+              </a:rPr>
+              <a:t>We do it by inheriting form are base and then overriding the function that we are wrapping, </a:t>
+            </a:r>
+            <a:r>
+              <a:rPr lang="en-GB" sz="2800">
+                <a:ea typeface="Calibri"/>
+                <a:cs typeface="Calibri"/>
+              </a:rPr>
+              <a:t>and after we call the original function in are base.</a:t>
+            </a:r>
+            <a:endParaRPr lang="en-GB" sz="2800" dirty="0">
+              <a:ea typeface="Calibri"/>
+              <a:cs typeface="Calibri"/>
+            </a:endParaRPr>
+          </a:p>
+          <a:p>
+            <a:endParaRPr lang="en-GB" sz="2800" dirty="0">
+              <a:ea typeface="Calibri"/>
+              <a:cs typeface="Calibri"/>
+            </a:endParaRPr>
+          </a:p>
+          <a:p>
+            <a:r>
+              <a:rPr lang="en-GB" sz="2800" dirty="0">
+                <a:ea typeface="Calibri"/>
+                <a:cs typeface="Calibri"/>
+              </a:rPr>
+              <a:t>this changes the overall outcome but the base functionality stays the same.</a:t>
+            </a:r>
+            <a:endParaRPr lang="en-GB" sz="2800" dirty="0"/>
+          </a:p>
+        </p:txBody>
+      </p:sp>
+    </p:spTree>
+    <p:extLst>
+      <p:ext uri="{BB962C8B-B14F-4D97-AF65-F5344CB8AC3E}">
+        <p14:creationId xmlns:p14="http://schemas.microsoft.com/office/powerpoint/2010/main" val="2372784607"/>
+      </p:ext>
+    </p:extLst>
+  </p:cSld>
+  <p:clrMapOvr>
+    <a:masterClrMapping/>
+  </p:clrMapOvr>
+</p:sld>
+</file>
+
+<file path=ppt/slides/slide11.xml><?xml version="1.0" encoding="utf-8"?>
+<p:sld xmlns:a="http://schemas.openxmlformats.org/drawingml/2006/main" xmlns:r="http://schemas.openxmlformats.org/officeDocument/2006/relationships" xmlns:p="http://schemas.openxmlformats.org/presentationml/2006/main">
+  <p:cSld>
+    <p:spTree>
+      <p:nvGrpSpPr>
+        <p:cNvPr id="1" name=""/>
+        <p:cNvGrpSpPr/>
+        <p:nvPr/>
+      </p:nvGrpSpPr>
+      <p:grpSpPr>
+        <a:xfrm>
+          <a:off x="0" y="0"/>
+          <a:ext cx="0" cy="0"/>
+          <a:chOff x="0" y="0"/>
+          <a:chExt cx="0" cy="0"/>
+        </a:xfrm>
+      </p:grpSpPr>
+      <p:sp>
+        <p:nvSpPr>
+          <p:cNvPr id="6" name="Rectangle 5">
+            <a:extLst>
+              <a:ext uri="{FF2B5EF4-FFF2-40B4-BE49-F238E27FC236}">
+                <a16:creationId xmlns:a16="http://schemas.microsoft.com/office/drawing/2014/main" id="{B5FFFBFA-6D86-7424-17E4-1EE13DC9C8EA}"/>
+              </a:ext>
+            </a:extLst>
+          </p:cNvPr>
+          <p:cNvSpPr/>
+          <p:nvPr/>
+        </p:nvSpPr>
+        <p:spPr>
+          <a:xfrm>
+            <a:off x="0" y="0"/>
+            <a:ext cx="12192000" cy="6858000"/>
+          </a:xfrm>
+          <a:prstGeom prst="rect">
+            <a:avLst/>
+          </a:prstGeom>
+        </p:spPr>
+        <p:style>
+          <a:lnRef idx="0">
+            <a:schemeClr val="accent2"/>
+          </a:lnRef>
+          <a:fillRef idx="3">
+            <a:schemeClr val="accent2"/>
+          </a:fillRef>
+          <a:effectRef idx="3">
+            <a:schemeClr val="accent2"/>
+          </a:effectRef>
+          <a:fontRef idx="minor">
+            <a:schemeClr val="lt1"/>
+          </a:fontRef>
+        </p:style>
+        <p:txBody>
+          <a:bodyPr rtlCol="0" anchor="ctr"/>
+          <a:lstStyle/>
+          <a:p>
+            <a:pPr algn="ctr"/>
+            <a:endParaRPr lang="en-GB"/>
+          </a:p>
+        </p:txBody>
+      </p:sp>
+      <p:pic>
+        <p:nvPicPr>
+          <p:cNvPr id="4" name="Content Placeholder 3" descr="A computer code on a black background&#10;&#10;AI-generated content may be incorrect.">
+            <a:extLst>
+              <a:ext uri="{FF2B5EF4-FFF2-40B4-BE49-F238E27FC236}">
+                <a16:creationId xmlns:a16="http://schemas.microsoft.com/office/drawing/2014/main" id="{CA85F88B-7876-E1C5-E611-4300F08B3280}"/>
+              </a:ext>
+            </a:extLst>
+          </p:cNvPr>
+          <p:cNvPicPr>
+            <a:picLocks noGrp="1" noChangeAspect="1"/>
+          </p:cNvPicPr>
+          <p:nvPr>
+            <p:ph idx="1"/>
+          </p:nvPr>
+        </p:nvPicPr>
+        <p:blipFill>
+          <a:blip r:embed="rId2"/>
+          <a:stretch>
+            <a:fillRect/>
+          </a:stretch>
+        </p:blipFill>
+        <p:spPr>
+          <a:xfrm>
+            <a:off x="3123919" y="418213"/>
+            <a:ext cx="5935195" cy="3194797"/>
+          </a:xfrm>
+          <a:prstGeom prst="rect">
+            <a:avLst/>
+          </a:prstGeom>
+        </p:spPr>
+      </p:pic>
+      <p:sp>
+        <p:nvSpPr>
+          <p:cNvPr id="8" name="TextBox 7">
+            <a:extLst>
+              <a:ext uri="{FF2B5EF4-FFF2-40B4-BE49-F238E27FC236}">
+                <a16:creationId xmlns:a16="http://schemas.microsoft.com/office/drawing/2014/main" id="{571760F9-60B1-9AC4-0BD0-B217124666C0}"/>
+              </a:ext>
+            </a:extLst>
+          </p:cNvPr>
+          <p:cNvSpPr txBox="1"/>
+          <p:nvPr/>
+        </p:nvSpPr>
+        <p:spPr>
+          <a:xfrm>
+            <a:off x="895655" y="4621480"/>
+            <a:ext cx="10410701" cy="1323439"/>
+          </a:xfrm>
+          <a:prstGeom prst="rect">
+            <a:avLst/>
+          </a:prstGeom>
+          <a:noFill/>
+        </p:spPr>
+        <p:txBody>
+          <a:bodyPr rot="0" spcFirstLastPara="0" vertOverflow="overflow" horzOverflow="overflow" vert="horz" wrap="square" lIns="91440" tIns="45720" rIns="91440" bIns="45720" numCol="1" spcCol="0" rtlCol="0" fromWordArt="0" anchor="t" anchorCtr="0" forceAA="0" compatLnSpc="1">
+            <a:prstTxWarp prst="textNoShape">
+              <a:avLst/>
+            </a:prstTxWarp>
+            <a:spAutoFit/>
+          </a:bodyPr>
+          <a:lstStyle/>
+          <a:p>
+            <a:pPr algn="ctr"/>
+            <a:r>
+              <a:rPr lang="en-GB" sz="4000" dirty="0">
+                <a:ea typeface="Calibri"/>
+                <a:cs typeface="Calibri"/>
+              </a:rPr>
+              <a:t>Now that we have finished with creating are decorator we can use them like this.</a:t>
+            </a:r>
+            <a:endParaRPr lang="en-US"/>
+          </a:p>
+        </p:txBody>
+      </p:sp>
+    </p:spTree>
+    <p:extLst>
+      <p:ext uri="{BB962C8B-B14F-4D97-AF65-F5344CB8AC3E}">
+        <p14:creationId xmlns:p14="http://schemas.microsoft.com/office/powerpoint/2010/main" val="1976471691"/>
+      </p:ext>
+    </p:extLst>
+  </p:cSld>
+  <p:clrMapOvr>
+    <a:masterClrMapping/>
+  </p:clrMapOvr>
+</p:sld>
+</file>
+
+<file path=ppt/slides/slide12.xml><?xml version="1.0" encoding="utf-8"?>
+<p:sld xmlns:a="http://schemas.openxmlformats.org/drawingml/2006/main" xmlns:r="http://schemas.openxmlformats.org/officeDocument/2006/relationships" xmlns:p="http://schemas.openxmlformats.org/presentationml/2006/main">
+  <p:cSld>
+    <p:spTree>
+      <p:nvGrpSpPr>
+        <p:cNvPr id="1" name=""/>
+        <p:cNvGrpSpPr/>
+        <p:nvPr/>
+      </p:nvGrpSpPr>
+      <p:grpSpPr>
+        <a:xfrm>
+          <a:off x="0" y="0"/>
+          <a:ext cx="0" cy="0"/>
+          <a:chOff x="0" y="0"/>
+          <a:chExt cx="0" cy="0"/>
+        </a:xfrm>
+      </p:grpSpPr>
+      <p:sp>
+        <p:nvSpPr>
+          <p:cNvPr id="5" name="Rectangle 4">
+            <a:extLst>
+              <a:ext uri="{FF2B5EF4-FFF2-40B4-BE49-F238E27FC236}">
+                <a16:creationId xmlns:a16="http://schemas.microsoft.com/office/drawing/2014/main" id="{A5D7727E-1BA5-6E98-70C4-2B72AF7A35D6}"/>
+              </a:ext>
+            </a:extLst>
+          </p:cNvPr>
+          <p:cNvSpPr/>
+          <p:nvPr/>
+        </p:nvSpPr>
+        <p:spPr>
+          <a:xfrm>
+            <a:off x="0" y="1"/>
+            <a:ext cx="12192000" cy="6858000"/>
+          </a:xfrm>
+          <a:prstGeom prst="rect">
+            <a:avLst/>
+          </a:prstGeom>
+        </p:spPr>
+        <p:style>
+          <a:lnRef idx="0">
+            <a:schemeClr val="accent2"/>
+          </a:lnRef>
+          <a:fillRef idx="3">
+            <a:schemeClr val="accent2"/>
+          </a:fillRef>
+          <a:effectRef idx="3">
+            <a:schemeClr val="accent2"/>
+          </a:effectRef>
+          <a:fontRef idx="minor">
+            <a:schemeClr val="lt1"/>
+          </a:fontRef>
+        </p:style>
+        <p:txBody>
+          <a:bodyPr lIns="91440" tIns="45720" rIns="91440" bIns="45720" rtlCol="0" anchor="ctr"/>
+          <a:lstStyle/>
+          <a:p>
+            <a:pPr algn="ctr"/>
+            <a:endParaRPr lang="en-GB" dirty="0">
+              <a:ea typeface="Calibri"/>
+              <a:cs typeface="Calibri"/>
+            </a:endParaRPr>
+          </a:p>
+        </p:txBody>
+      </p:sp>
+      <p:sp>
+        <p:nvSpPr>
+          <p:cNvPr id="2" name="Title 1">
+            <a:extLst>
+              <a:ext uri="{FF2B5EF4-FFF2-40B4-BE49-F238E27FC236}">
+                <a16:creationId xmlns:a16="http://schemas.microsoft.com/office/drawing/2014/main" id="{7E2DB7E7-262B-1D62-9024-98833DF046E4}"/>
+              </a:ext>
+            </a:extLst>
+          </p:cNvPr>
+          <p:cNvSpPr>
+            <a:spLocks noGrp="1"/>
+          </p:cNvSpPr>
+          <p:nvPr>
+            <p:ph type="title"/>
+          </p:nvPr>
+        </p:nvSpPr>
+        <p:spPr/>
+        <p:txBody>
+          <a:bodyPr vert="horz" lIns="91440" tIns="45720" rIns="91440" bIns="45720" rtlCol="0" anchor="ctr">
+            <a:noAutofit/>
+          </a:bodyPr>
+          <a:lstStyle/>
+          <a:p>
+            <a:r>
+              <a:rPr lang="en-GB" sz="6000" dirty="0">
+                <a:ea typeface="Calibri Light"/>
+                <a:cs typeface="Calibri Light"/>
+              </a:rPr>
+              <a:t>But why </a:t>
+            </a:r>
+            <a:r>
+              <a:rPr lang="en-GB" sz="6000">
+                <a:ea typeface="Calibri Light"/>
+                <a:cs typeface="Calibri Light"/>
+              </a:rPr>
+              <a:t>would I ever want to do this?</a:t>
+            </a:r>
+            <a:endParaRPr lang="en-GB" sz="4800">
+              <a:ea typeface="Calibri Light" panose="020F0302020204030204"/>
+              <a:cs typeface="Calibri Light" panose="020F0302020204030204"/>
+            </a:endParaRPr>
+          </a:p>
+        </p:txBody>
+      </p:sp>
+      <p:sp>
+        <p:nvSpPr>
+          <p:cNvPr id="3" name="Content Placeholder 2">
+            <a:extLst>
+              <a:ext uri="{FF2B5EF4-FFF2-40B4-BE49-F238E27FC236}">
+                <a16:creationId xmlns:a16="http://schemas.microsoft.com/office/drawing/2014/main" id="{7A5A2178-1D69-401E-5ECE-A8DF8CB6E697}"/>
+              </a:ext>
+            </a:extLst>
+          </p:cNvPr>
+          <p:cNvSpPr>
+            <a:spLocks noGrp="1"/>
+          </p:cNvSpPr>
+          <p:nvPr>
+            <p:ph idx="1"/>
+          </p:nvPr>
+        </p:nvSpPr>
+        <p:spPr>
+          <a:xfrm>
+            <a:off x="838200" y="1825625"/>
+            <a:ext cx="10515600" cy="4828330"/>
+          </a:xfrm>
+        </p:spPr>
+        <p:txBody>
+          <a:bodyPr vert="horz" lIns="91440" tIns="45720" rIns="91440" bIns="45720" rtlCol="0" anchor="t">
+            <a:noAutofit/>
+          </a:bodyPr>
+          <a:lstStyle/>
+          <a:p>
+            <a:pPr marL="0" indent="0">
+              <a:buNone/>
+            </a:pPr>
+            <a:r>
+              <a:rPr lang="en-GB" sz="3600" dirty="0">
+                <a:ea typeface="Calibri" panose="020F0502020204030204"/>
+                <a:cs typeface="Calibri" panose="020F0502020204030204"/>
+              </a:rPr>
+              <a:t>It can make creating object that are similar easier because instead of making lots of objects all with the same base functionality we can create one with all the func</a:t>
+            </a:r>
+            <a:r>
+              <a:rPr lang="en-GB" sz="3600">
+                <a:solidFill>
+                  <a:srgbClr val="000000"/>
+                </a:solidFill>
+                <a:latin typeface="Calibri"/>
+                <a:ea typeface="Calibri"/>
+                <a:cs typeface="Calibri"/>
+              </a:rPr>
+              <a:t>tionality that we want layered on top.</a:t>
+            </a:r>
+            <a:endParaRPr lang="en-US" sz="3600">
+              <a:ea typeface="Calibri"/>
+              <a:cs typeface="Calibri"/>
+            </a:endParaRPr>
+          </a:p>
+          <a:p>
+            <a:pPr marL="0" indent="0">
+              <a:buNone/>
+            </a:pPr>
+            <a:endParaRPr lang="en-GB" sz="3600" dirty="0">
+              <a:ea typeface="Calibri" panose="020F0502020204030204"/>
+              <a:cs typeface="Calibri" panose="020F0502020204030204"/>
+            </a:endParaRPr>
+          </a:p>
+          <a:p>
+            <a:pPr marL="0" indent="0">
+              <a:buNone/>
+            </a:pPr>
+            <a:r>
+              <a:rPr lang="en-GB" sz="3600" dirty="0">
+                <a:ea typeface="Calibri" panose="020F0502020204030204"/>
+                <a:cs typeface="Calibri" panose="020F0502020204030204"/>
+              </a:rPr>
+              <a:t>Doing this also makes it </a:t>
+            </a:r>
+            <a:r>
+              <a:rPr lang="en-GB" sz="3600">
+                <a:ea typeface="Calibri" panose="020F0502020204030204"/>
+                <a:cs typeface="Calibri" panose="020F0502020204030204"/>
+              </a:rPr>
+              <a:t>easier</a:t>
+            </a:r>
+            <a:r>
+              <a:rPr lang="en-GB" sz="3600" dirty="0">
+                <a:ea typeface="Calibri" panose="020F0502020204030204"/>
+                <a:cs typeface="Calibri" panose="020F0502020204030204"/>
+              </a:rPr>
+              <a:t> for us when it comes to having to write the code, because instead of needing to call multiple functions for the same result, we can just call one giving us the result that we want.</a:t>
+            </a:r>
+          </a:p>
+        </p:txBody>
+      </p:sp>
+    </p:spTree>
+    <p:extLst>
+      <p:ext uri="{BB962C8B-B14F-4D97-AF65-F5344CB8AC3E}">
+        <p14:creationId xmlns:p14="http://schemas.microsoft.com/office/powerpoint/2010/main" val="2772846404"/>
+      </p:ext>
+    </p:extLst>
+  </p:cSld>
+  <p:clrMapOvr>
+    <a:masterClrMapping/>
+  </p:clrMapOvr>
+</p:sld>
+</file>
+
+<file path=ppt/slides/slide13.xml><?xml version="1.0" encoding="utf-8"?>
+<p:sld xmlns:a="http://schemas.openxmlformats.org/drawingml/2006/main" xmlns:r="http://schemas.openxmlformats.org/officeDocument/2006/relationships" xmlns:p="http://schemas.openxmlformats.org/presentationml/2006/main">
+  <p:cSld>
+    <p:spTree>
+      <p:nvGrpSpPr>
+        <p:cNvPr id="1" name=""/>
+        <p:cNvGrpSpPr/>
+        <p:nvPr/>
+      </p:nvGrpSpPr>
+      <p:grpSpPr>
+        <a:xfrm>
+          <a:off x="0" y="0"/>
+          <a:ext cx="0" cy="0"/>
+          <a:chOff x="0" y="0"/>
+          <a:chExt cx="0" cy="0"/>
+        </a:xfrm>
+      </p:grpSpPr>
+      <p:sp>
+        <p:nvSpPr>
+          <p:cNvPr id="5" name="Rectangle 4">
+            <a:extLst>
+              <a:ext uri="{FF2B5EF4-FFF2-40B4-BE49-F238E27FC236}">
+                <a16:creationId xmlns:a16="http://schemas.microsoft.com/office/drawing/2014/main" id="{96880F16-2638-2A59-9E55-5F11B7A274F1}"/>
+              </a:ext>
+            </a:extLst>
+          </p:cNvPr>
+          <p:cNvSpPr/>
+          <p:nvPr/>
+        </p:nvSpPr>
+        <p:spPr>
+          <a:xfrm>
+            <a:off x="0" y="1"/>
+            <a:ext cx="12192000" cy="6858000"/>
+          </a:xfrm>
+          <a:prstGeom prst="rect">
+            <a:avLst/>
+          </a:prstGeom>
+        </p:spPr>
+        <p:style>
+          <a:lnRef idx="0">
+            <a:schemeClr val="accent2"/>
+          </a:lnRef>
+          <a:fillRef idx="3">
+            <a:schemeClr val="accent2"/>
+          </a:fillRef>
+          <a:effectRef idx="3">
+            <a:schemeClr val="accent2"/>
+          </a:effectRef>
+          <a:fontRef idx="minor">
+            <a:schemeClr val="lt1"/>
+          </a:fontRef>
+        </p:style>
+        <p:txBody>
+          <a:bodyPr lIns="91440" tIns="45720" rIns="91440" bIns="45720" rtlCol="0" anchor="ctr"/>
+          <a:lstStyle/>
+          <a:p>
+            <a:pPr algn="ctr"/>
+            <a:endParaRPr lang="en-GB" dirty="0">
+              <a:ea typeface="Calibri"/>
+              <a:cs typeface="Calibri"/>
+            </a:endParaRPr>
+          </a:p>
+        </p:txBody>
+      </p:sp>
+      <p:sp>
+        <p:nvSpPr>
+          <p:cNvPr id="2" name="Title 1">
+            <a:extLst>
+              <a:ext uri="{FF2B5EF4-FFF2-40B4-BE49-F238E27FC236}">
+                <a16:creationId xmlns:a16="http://schemas.microsoft.com/office/drawing/2014/main" id="{4ACD7103-BCE0-F773-8238-B933C574963B}"/>
+              </a:ext>
+            </a:extLst>
+          </p:cNvPr>
+          <p:cNvSpPr>
+            <a:spLocks noGrp="1"/>
+          </p:cNvSpPr>
+          <p:nvPr>
+            <p:ph type="title"/>
+          </p:nvPr>
+        </p:nvSpPr>
+        <p:spPr/>
+        <p:txBody>
+          <a:bodyPr/>
+          <a:lstStyle/>
+          <a:p>
+            <a:r>
+              <a:rPr lang="en-GB" dirty="0">
+                <a:ea typeface="Calibri Light"/>
+                <a:cs typeface="Calibri Light"/>
+              </a:rPr>
+              <a:t>Are there any dow</a:t>
+            </a:r>
+            <a:r>
+              <a:rPr lang="en-GB">
+                <a:ea typeface="Calibri Light"/>
+                <a:cs typeface="Calibri Light"/>
+              </a:rPr>
+              <a:t>nsides???</a:t>
+            </a:r>
+            <a:endParaRPr lang="en-GB" dirty="0">
+              <a:ea typeface="Calibri Light"/>
+              <a:cs typeface="Calibri Light"/>
+            </a:endParaRPr>
+          </a:p>
+        </p:txBody>
+      </p:sp>
+      <p:sp>
+        <p:nvSpPr>
+          <p:cNvPr id="3" name="Content Placeholder 2">
+            <a:extLst>
+              <a:ext uri="{FF2B5EF4-FFF2-40B4-BE49-F238E27FC236}">
+                <a16:creationId xmlns:a16="http://schemas.microsoft.com/office/drawing/2014/main" id="{2CA8C18F-BACF-DF5F-1F6A-15E95DEF8649}"/>
+              </a:ext>
+            </a:extLst>
+          </p:cNvPr>
+          <p:cNvSpPr>
+            <a:spLocks noGrp="1"/>
+          </p:cNvSpPr>
+          <p:nvPr>
+            <p:ph idx="1"/>
+          </p:nvPr>
+        </p:nvSpPr>
+        <p:spPr/>
+        <p:txBody>
+          <a:bodyPr vert="horz" lIns="91440" tIns="45720" rIns="91440" bIns="45720" rtlCol="0" anchor="t">
+            <a:normAutofit/>
+          </a:bodyPr>
+          <a:lstStyle/>
+          <a:p>
+            <a:pPr marL="0" indent="0">
+              <a:buNone/>
+            </a:pPr>
+            <a:r>
+              <a:rPr lang="en-GB" dirty="0">
+                <a:ea typeface="Calibri"/>
+                <a:cs typeface="Calibri"/>
+              </a:rPr>
+              <a:t>A big disadvantage is that when you use decorators you are still reserving pieces of memory when you new it again, meaning that even though we </a:t>
+            </a:r>
+            <a:r>
+              <a:rPr lang="en-GB">
+                <a:ea typeface="Calibri"/>
+                <a:cs typeface="Calibri"/>
+              </a:rPr>
+              <a:t>are not using multiple objects we are still using multiple spaces in are memory.</a:t>
+            </a:r>
+            <a:endParaRPr lang="en-US"/>
+          </a:p>
+          <a:p>
+            <a:pPr marL="0" indent="0">
+              <a:buNone/>
+            </a:pPr>
+            <a:endParaRPr lang="en-GB" dirty="0">
+              <a:ea typeface="Calibri"/>
+              <a:cs typeface="Calibri"/>
+            </a:endParaRPr>
+          </a:p>
+          <a:p>
+            <a:pPr marL="0" indent="0">
+              <a:buNone/>
+            </a:pPr>
+            <a:r>
+              <a:rPr lang="en-GB" dirty="0">
+                <a:ea typeface="Calibri"/>
+                <a:cs typeface="Calibri"/>
+              </a:rPr>
+              <a:t>Also, the complexity of decorators can make code hard to follow </a:t>
+            </a:r>
+            <a:r>
+              <a:rPr lang="en-GB">
+                <a:ea typeface="Calibri"/>
+                <a:cs typeface="Calibri"/>
+              </a:rPr>
+              <a:t>through and debug when adding to many of them, which is why you </a:t>
+            </a:r>
+            <a:r>
+              <a:rPr lang="en-GB" dirty="0">
+                <a:ea typeface="Calibri"/>
+                <a:cs typeface="Calibri"/>
+              </a:rPr>
+              <a:t>should not create tones and put them on one object.</a:t>
+            </a:r>
+          </a:p>
+        </p:txBody>
+      </p:sp>
+    </p:spTree>
+    <p:extLst>
+      <p:ext uri="{BB962C8B-B14F-4D97-AF65-F5344CB8AC3E}">
+        <p14:creationId xmlns:p14="http://schemas.microsoft.com/office/powerpoint/2010/main" val="3214604137"/>
+      </p:ext>
+    </p:extLst>
+  </p:cSld>
+  <p:clrMapOvr>
+    <a:masterClrMapping/>
+  </p:clrMapOvr>
+</p:sld>
+</file>
+
 <file path=ppt/slides/slide2.xml><?xml version="1.0" encoding="utf-8"?>
 <p:sld xmlns:a="http://schemas.openxmlformats.org/drawingml/2006/main" xmlns:r="http://schemas.openxmlformats.org/officeDocument/2006/relationships" xmlns:p="http://schemas.openxmlformats.org/presentationml/2006/main">
   <p:cSld>
@@ -4069,8 +4851,8 @@
           </a:p>
         </p:txBody>
       </p:sp>
-      <mc:AlternateContent xmlns:mc="http://schemas.openxmlformats.org/markup-compatibility/2006">
-        <mc:Choice xmlns:p14="http://schemas.microsoft.com/office/powerpoint/2010/main" Requires="p14">
+      <mc:AlternateContent xmlns:mc="http://schemas.openxmlformats.org/markup-compatibility/2006" xmlns:p14="http://schemas.microsoft.com/office/powerpoint/2010/main">
+        <mc:Choice Requires="p14">
           <p:contentPart p14:bwMode="auto" r:id="rId2">
             <p14:nvContentPartPr>
               <p14:cNvPr id="4" name="Ink 3">
@@ -4089,7 +4871,7 @@
             </p14:xfrm>
           </p:contentPart>
         </mc:Choice>
-        <mc:Fallback>
+        <mc:Fallback xmlns="">
           <p:pic>
             <p:nvPicPr>
               <p:cNvPr id="4" name="Ink 3">
@@ -4217,14 +4999,14 @@
           <a:noFill/>
         </p:spPr>
         <p:txBody>
-          <a:bodyPr wrap="square" rtlCol="0">
+          <a:bodyPr wrap="square" lIns="91440" tIns="45720" rIns="91440" bIns="45720" rtlCol="0" anchor="t">
             <a:spAutoFit/>
           </a:bodyPr>
           <a:lstStyle/>
           <a:p>
             <a:r>
               <a:rPr lang="en-GB" sz="4000" dirty="0"/>
-              <a:t>You can also wrap object any number of times because both the object and decorator follow the same interface which will result in a stacking behave or of all the wrappers.</a:t>
+              <a:t>You can also wrap  a object any number of times because both the object and decorator follow the same interface which will result in a stacking behave with all the wrappers.</a:t>
             </a:r>
           </a:p>
           <a:p>
@@ -4669,15 +5451,88 @@
           </a:xfrm>
         </p:spPr>
         <p:txBody>
-          <a:bodyPr/>
+          <a:bodyPr vert="horz" lIns="91440" tIns="45720" rIns="91440" bIns="45720" rtlCol="0" anchor="t">
+            <a:normAutofit/>
+          </a:bodyPr>
           <a:lstStyle/>
           <a:p>
             <a:pPr marL="0" indent="0">
               <a:buNone/>
             </a:pPr>
             <a:r>
-              <a:rPr lang="en-GB" dirty="0"/>
-              <a:t>Lets say that we create a function in are class health that adds 100 hp and then we create a new class called playerHealthDecorator that makes is so that now when we call are Heal() to add 100hp we also add another 50 shield on top of it because they are a player in addition to having health.</a:t>
+              <a:rPr lang="en-GB" dirty="0">
+                <a:ea typeface="Calibri" panose="020F0502020204030204"/>
+                <a:cs typeface="Calibri" panose="020F0502020204030204"/>
+              </a:rPr>
+              <a:t>If you make a </a:t>
+            </a:r>
+            <a:r>
+              <a:rPr lang="en-GB" dirty="0" err="1">
+                <a:ea typeface="Calibri" panose="020F0502020204030204"/>
+                <a:cs typeface="Calibri" panose="020F0502020204030204"/>
+              </a:rPr>
+              <a:t>IWeapon</a:t>
+            </a:r>
+            <a:r>
+              <a:rPr lang="en-GB" dirty="0">
+                <a:ea typeface="Calibri" panose="020F0502020204030204"/>
+                <a:cs typeface="Calibri" panose="020F0502020204030204"/>
+              </a:rPr>
+              <a:t> interface, and then used that for a object called </a:t>
+            </a:r>
+            <a:r>
+              <a:rPr lang="en-GB" dirty="0" err="1">
+                <a:ea typeface="Calibri" panose="020F0502020204030204"/>
+                <a:cs typeface="Calibri" panose="020F0502020204030204"/>
+              </a:rPr>
+              <a:t>BaseSword</a:t>
+            </a:r>
+            <a:r>
+              <a:rPr lang="en-GB" dirty="0">
+                <a:ea typeface="Calibri" panose="020F0502020204030204"/>
+                <a:cs typeface="Calibri" panose="020F0502020204030204"/>
+              </a:rPr>
+              <a:t> then we have are base("</a:t>
+            </a:r>
+            <a:r>
+              <a:rPr lang="en-GB" dirty="0" err="1">
+                <a:ea typeface="Calibri" panose="020F0502020204030204"/>
+                <a:cs typeface="Calibri" panose="020F0502020204030204"/>
+              </a:rPr>
+              <a:t>wrappee</a:t>
+            </a:r>
+            <a:r>
+              <a:rPr lang="en-GB" dirty="0">
+                <a:ea typeface="Calibri" panose="020F0502020204030204"/>
+                <a:cs typeface="Calibri" panose="020F0502020204030204"/>
+              </a:rPr>
+              <a:t>") that we can decorate or "Wrap", so now we can change the functionality of the sword to not only do damage, but we can also have it inflict a status effect like a bleed effect or something </a:t>
+            </a:r>
+            <a:r>
+              <a:rPr lang="en-GB" dirty="0" err="1">
+                <a:ea typeface="Calibri" panose="020F0502020204030204"/>
+                <a:cs typeface="Calibri" panose="020F0502020204030204"/>
+              </a:rPr>
+              <a:t>simulare</a:t>
+            </a:r>
+            <a:r>
+              <a:rPr lang="en-GB" dirty="0">
+                <a:ea typeface="Calibri" panose="020F0502020204030204"/>
+                <a:cs typeface="Calibri" panose="020F0502020204030204"/>
+              </a:rPr>
+              <a:t>.</a:t>
+            </a:r>
+          </a:p>
+          <a:p>
+            <a:pPr marL="0" indent="0">
+              <a:buNone/>
+            </a:pPr>
+            <a:r>
+              <a:rPr lang="en-GB" dirty="0">
+                <a:ea typeface="Calibri" panose="020F0502020204030204"/>
+                <a:cs typeface="Calibri" panose="020F0502020204030204"/>
+              </a:rPr>
+              <a:t>So even after altering the way the sword works, it still keeps the basic functionality of a weapon by dealing damage.</a:t>
             </a:r>
           </a:p>
         </p:txBody>
@@ -4719,94 +5574,92 @@
       </p:sp>
       <p:pic>
         <p:nvPicPr>
-          <p:cNvPr id="4118" name="Picture 22" descr="item_healthkit_medium - Valve Developer Community">
-            <a:extLst>
-              <a:ext uri="{FF2B5EF4-FFF2-40B4-BE49-F238E27FC236}">
-                <a16:creationId xmlns:a16="http://schemas.microsoft.com/office/drawing/2014/main" id="{130C7F0C-FC26-4CE8-A7C9-8B76C34ABE03}"/>
+          <p:cNvPr id="2" name="Picture 1" descr="File:Iron Sword.png - The Twilight Forest Wiki">
+            <a:extLst>
+              <a:ext uri="{FF2B5EF4-FFF2-40B4-BE49-F238E27FC236}">
+                <a16:creationId xmlns:a16="http://schemas.microsoft.com/office/drawing/2014/main" id="{380B425F-9538-E3E3-41DB-BFE3EBA687A6}"/>
               </a:ext>
             </a:extLst>
           </p:cNvPr>
           <p:cNvPicPr>
-            <a:picLocks noChangeAspect="1" noChangeArrowheads="1"/>
+            <a:picLocks noChangeAspect="1"/>
           </p:cNvPicPr>
           <p:nvPr/>
         </p:nvPicPr>
         <p:blipFill>
-          <a:blip r:embed="rId2">
-            <a:extLst>
-              <a:ext uri="{28A0092B-C50C-407E-A947-70E740481C1C}">
-                <a14:useLocalDpi xmlns:a14="http://schemas.microsoft.com/office/drawing/2010/main" val="0"/>
-              </a:ext>
-            </a:extLst>
-          </a:blip>
-          <a:srcRect/>
+          <a:blip r:embed="rId2"/>
           <a:stretch>
             <a:fillRect/>
           </a:stretch>
         </p:blipFill>
-        <p:spPr bwMode="auto">
+        <p:spPr>
           <a:xfrm>
-            <a:off x="9266766" y="2741161"/>
-            <a:ext cx="2699906" cy="2038429"/>
+            <a:off x="9015351" y="3142013"/>
+            <a:ext cx="2335481" cy="2335481"/>
           </a:xfrm>
           <a:prstGeom prst="rect">
             <a:avLst/>
           </a:prstGeom>
-          <a:noFill/>
-          <a:extLst>
-            <a:ext uri="{909E8E84-426E-40DD-AFC4-6F175D3DCCD1}">
-              <a14:hiddenFill xmlns:a14="http://schemas.microsoft.com/office/drawing/2010/main">
-                <a:solidFill>
-                  <a:srgbClr val="FFFFFF"/>
-                </a:solidFill>
-              </a14:hiddenFill>
-            </a:ext>
-          </a:extLst>
         </p:spPr>
       </p:pic>
       <p:pic>
         <p:nvPicPr>
-          <p:cNvPr id="4126" name="Picture 30" descr="Heavy - Liquipedia Team Fortress Wiki">
-            <a:extLst>
-              <a:ext uri="{FF2B5EF4-FFF2-40B4-BE49-F238E27FC236}">
-                <a16:creationId xmlns:a16="http://schemas.microsoft.com/office/drawing/2014/main" id="{62C5B0B1-5F14-4AF6-BE07-EFC0092D03B4}"/>
+          <p:cNvPr id="4" name="Picture 3" descr="Enchanted Book PNG Transparent Images">
+            <a:extLst>
+              <a:ext uri="{FF2B5EF4-FFF2-40B4-BE49-F238E27FC236}">
+                <a16:creationId xmlns:a16="http://schemas.microsoft.com/office/drawing/2014/main" id="{2BBF9CFE-6C0C-64A4-4D2B-2688ABFEAB30}"/>
               </a:ext>
             </a:extLst>
           </p:cNvPr>
           <p:cNvPicPr>
-            <a:picLocks noChangeAspect="1" noChangeArrowheads="1"/>
+            <a:picLocks noChangeAspect="1"/>
           </p:cNvPicPr>
           <p:nvPr/>
         </p:nvPicPr>
-        <p:blipFill rotWithShape="1">
-          <a:blip r:embed="rId3">
-            <a:extLst>
-              <a:ext uri="{28A0092B-C50C-407E-A947-70E740481C1C}">
-                <a14:useLocalDpi xmlns:a14="http://schemas.microsoft.com/office/drawing/2010/main" val="0"/>
-              </a:ext>
-            </a:extLst>
-          </a:blip>
-          <a:srcRect b="72222"/>
-          <a:stretch/>
+        <p:blipFill>
+          <a:blip r:embed="rId3"/>
+          <a:stretch>
+            <a:fillRect/>
+          </a:stretch>
         </p:blipFill>
-        <p:spPr bwMode="auto">
+        <p:spPr>
           <a:xfrm>
-            <a:off x="6951132" y="4953000"/>
-            <a:ext cx="4064000" cy="1905000"/>
+            <a:off x="8682841" y="2651166"/>
+            <a:ext cx="1189512" cy="1199408"/>
           </a:xfrm>
           <a:prstGeom prst="rect">
             <a:avLst/>
           </a:prstGeom>
-          <a:noFill/>
-          <a:extLst>
-            <a:ext uri="{909E8E84-426E-40DD-AFC4-6F175D3DCCD1}">
-              <a14:hiddenFill xmlns:a14="http://schemas.microsoft.com/office/drawing/2010/main">
-                <a:solidFill>
-                  <a:srgbClr val="FFFFFF"/>
-                </a:solidFill>
-              </a14:hiddenFill>
-            </a:ext>
-          </a:extLst>
+        </p:spPr>
+      </p:pic>
+      <p:pic>
+        <p:nvPicPr>
+          <p:cNvPr id="7" name="Picture 6" descr="Enchanted Book PNG Transparent Images">
+            <a:extLst>
+              <a:ext uri="{FF2B5EF4-FFF2-40B4-BE49-F238E27FC236}">
+                <a16:creationId xmlns:a16="http://schemas.microsoft.com/office/drawing/2014/main" id="{B7F2C282-41B8-818C-A438-85A44542D650}"/>
+              </a:ext>
+            </a:extLst>
+          </p:cNvPr>
+          <p:cNvPicPr>
+            <a:picLocks noChangeAspect="1"/>
+          </p:cNvPicPr>
+          <p:nvPr/>
+        </p:nvPicPr>
+        <p:blipFill>
+          <a:blip r:embed="rId3"/>
+          <a:stretch>
+            <a:fillRect/>
+          </a:stretch>
+        </p:blipFill>
+        <p:spPr>
+          <a:xfrm>
+            <a:off x="10188039" y="1425039"/>
+            <a:ext cx="1524000" cy="1484416"/>
+          </a:xfrm>
+          <a:prstGeom prst="rect">
+            <a:avLst/>
+          </a:prstGeom>
         </p:spPr>
       </p:pic>
     </p:spTree>
@@ -4899,24 +5752,200 @@
             <p:ph type="title"/>
           </p:nvPr>
         </p:nvSpPr>
-        <p:spPr/>
-        <p:txBody>
-          <a:bodyPr/>
-          <a:lstStyle/>
-          <a:p>
-            <a:r>
-              <a:rPr lang="en-GB" dirty="0"/>
-              <a:t>“But how do we do this???” I hear you ask!</a:t>
-            </a:r>
+        <p:spPr>
+          <a:xfrm>
+            <a:off x="284019" y="1710995"/>
+            <a:ext cx="11673441" cy="3443329"/>
+          </a:xfrm>
+        </p:spPr>
+        <p:txBody>
+          <a:bodyPr>
+            <a:noAutofit/>
+          </a:bodyPr>
+          <a:lstStyle/>
+          <a:p>
+            <a:pPr algn="ctr"/>
+            <a:r>
+              <a:rPr lang="en-GB" sz="8000"/>
+              <a:t>“But how do we do this???”</a:t>
+            </a:r>
+            <a:br>
+              <a:rPr lang="en-GB" sz="8000" dirty="0"/>
+            </a:br>
+            <a:r>
+              <a:rPr lang="en-GB" sz="8000"/>
+              <a:t> I hear you ask!!!</a:t>
+            </a:r>
+            <a:endParaRPr lang="en-GB" sz="8000">
+              <a:ea typeface="Calibri Light"/>
+              <a:cs typeface="Calibri Light"/>
+            </a:endParaRPr>
+          </a:p>
+        </p:txBody>
+      </p:sp>
+    </p:spTree>
+    <p:extLst>
+      <p:ext uri="{BB962C8B-B14F-4D97-AF65-F5344CB8AC3E}">
+        <p14:creationId xmlns:p14="http://schemas.microsoft.com/office/powerpoint/2010/main" val="764429502"/>
+      </p:ext>
+    </p:extLst>
+  </p:cSld>
+  <p:clrMapOvr>
+    <a:masterClrMapping/>
+  </p:clrMapOvr>
+</p:sld>
+</file>
+
+<file path=ppt/slides/slide8.xml><?xml version="1.0" encoding="utf-8"?>
+<p:sld xmlns:a="http://schemas.openxmlformats.org/drawingml/2006/main" xmlns:r="http://schemas.openxmlformats.org/officeDocument/2006/relationships" xmlns:p="http://schemas.openxmlformats.org/presentationml/2006/main">
+  <p:cSld>
+    <p:spTree>
+      <p:nvGrpSpPr>
+        <p:cNvPr id="1" name=""/>
+        <p:cNvGrpSpPr/>
+        <p:nvPr/>
+      </p:nvGrpSpPr>
+      <p:grpSpPr>
+        <a:xfrm>
+          <a:off x="0" y="0"/>
+          <a:ext cx="0" cy="0"/>
+          <a:chOff x="0" y="0"/>
+          <a:chExt cx="0" cy="0"/>
+        </a:xfrm>
+      </p:grpSpPr>
+      <p:sp>
+        <p:nvSpPr>
+          <p:cNvPr id="5" name="Rectangle 4">
+            <a:extLst>
+              <a:ext uri="{FF2B5EF4-FFF2-40B4-BE49-F238E27FC236}">
+                <a16:creationId xmlns:a16="http://schemas.microsoft.com/office/drawing/2014/main" id="{A7496CDC-3BD0-2B20-1923-1B8C7D8BDE45}"/>
+              </a:ext>
+            </a:extLst>
+          </p:cNvPr>
+          <p:cNvSpPr/>
+          <p:nvPr/>
+        </p:nvSpPr>
+        <p:spPr>
+          <a:xfrm>
+            <a:off x="0" y="0"/>
+            <a:ext cx="12192000" cy="6858000"/>
+          </a:xfrm>
+          <a:prstGeom prst="rect">
+            <a:avLst/>
+          </a:prstGeom>
+        </p:spPr>
+        <p:style>
+          <a:lnRef idx="0">
+            <a:schemeClr val="accent2"/>
+          </a:lnRef>
+          <a:fillRef idx="3">
+            <a:schemeClr val="accent2"/>
+          </a:fillRef>
+          <a:effectRef idx="3">
+            <a:schemeClr val="accent2"/>
+          </a:effectRef>
+          <a:fontRef idx="minor">
+            <a:schemeClr val="lt1"/>
+          </a:fontRef>
+        </p:style>
+        <p:txBody>
+          <a:bodyPr rtlCol="0" anchor="ctr"/>
+          <a:lstStyle/>
+          <a:p>
+            <a:pPr algn="ctr"/>
+            <a:endParaRPr lang="en-GB"/>
+          </a:p>
+        </p:txBody>
+      </p:sp>
+      <p:sp>
+        <p:nvSpPr>
+          <p:cNvPr id="3" name="Content Placeholder 2">
+            <a:extLst>
+              <a:ext uri="{FF2B5EF4-FFF2-40B4-BE49-F238E27FC236}">
+                <a16:creationId xmlns:a16="http://schemas.microsoft.com/office/drawing/2014/main" id="{F483B7C2-3AFD-8857-FF3B-366F58986832}"/>
+              </a:ext>
+            </a:extLst>
+          </p:cNvPr>
+          <p:cNvSpPr>
+            <a:spLocks noGrp="1"/>
+          </p:cNvSpPr>
+          <p:nvPr>
+            <p:ph idx="1"/>
+          </p:nvPr>
+        </p:nvSpPr>
+        <p:spPr>
+          <a:xfrm>
+            <a:off x="95994" y="3201184"/>
+            <a:ext cx="11990118" cy="3193493"/>
+          </a:xfrm>
+        </p:spPr>
+        <p:txBody>
+          <a:bodyPr vert="horz" lIns="91440" tIns="45720" rIns="91440" bIns="45720" rtlCol="0" anchor="t">
+            <a:noAutofit/>
+          </a:bodyPr>
+          <a:lstStyle/>
+          <a:p>
+            <a:pPr marL="0" indent="0">
+              <a:buNone/>
+            </a:pPr>
+            <a:r>
+              <a:rPr lang="en-GB" sz="6000" dirty="0">
+                <a:ea typeface="Calibri"/>
+                <a:cs typeface="Calibri"/>
+              </a:rPr>
+              <a:t>When creating a decorator, we will first need to </a:t>
+            </a:r>
+            <a:r>
+              <a:rPr lang="en-GB" sz="6000" dirty="0" err="1">
+                <a:ea typeface="Calibri"/>
+                <a:cs typeface="Calibri"/>
+              </a:rPr>
+              <a:t>creat</a:t>
+            </a:r>
+            <a:r>
+              <a:rPr lang="en-GB" sz="6000" dirty="0">
+                <a:ea typeface="Calibri"/>
+                <a:cs typeface="Calibri"/>
+              </a:rPr>
+              <a:t> a interface that will be the </a:t>
+            </a:r>
+            <a:r>
+              <a:rPr lang="en-GB" sz="6000" dirty="0" err="1">
+                <a:ea typeface="Calibri"/>
+                <a:cs typeface="Calibri"/>
+              </a:rPr>
+              <a:t>wrappee</a:t>
+            </a:r>
+            <a:r>
+              <a:rPr lang="en-GB" sz="6000" dirty="0">
+                <a:ea typeface="Calibri"/>
+                <a:cs typeface="Calibri"/>
+              </a:rPr>
+              <a:t> for our object. </a:t>
+            </a:r>
+            <a:endParaRPr lang="en-US"/>
+          </a:p>
+          <a:p>
+            <a:pPr marL="0" indent="0">
+              <a:buNone/>
+            </a:pPr>
+            <a:r>
+              <a:rPr lang="en-GB" sz="6000" dirty="0">
+                <a:ea typeface="Calibri"/>
+                <a:cs typeface="Calibri"/>
+              </a:rPr>
+              <a:t>(Don’t Forget the Destructor) </a:t>
+            </a:r>
+            <a:endParaRPr lang="en-GB"/>
           </a:p>
         </p:txBody>
       </p:sp>
       <p:pic>
         <p:nvPicPr>
-          <p:cNvPr id="7" name="Picture 6">
-            <a:extLst>
-              <a:ext uri="{FF2B5EF4-FFF2-40B4-BE49-F238E27FC236}">
-                <a16:creationId xmlns:a16="http://schemas.microsoft.com/office/drawing/2014/main" id="{3AEAAE0F-E869-4252-BF00-C48A64B5DF90}"/>
+          <p:cNvPr id="6" name="Picture 5" descr="A computer screen with text and numbers&#10;&#10;AI-generated content may be incorrect.">
+            <a:extLst>
+              <a:ext uri="{FF2B5EF4-FFF2-40B4-BE49-F238E27FC236}">
+                <a16:creationId xmlns:a16="http://schemas.microsoft.com/office/drawing/2014/main" id="{A18377FB-E916-9813-FBE7-A0CB91E298E6}"/>
               </a:ext>
             </a:extLst>
           </p:cNvPr>
@@ -4926,57 +5955,15 @@
           <p:nvPr/>
         </p:nvPicPr>
         <p:blipFill>
-          <a:blip r:embed="rId2">
-            <a:extLst>
-              <a:ext uri="{28A0092B-C50C-407E-A947-70E740481C1C}">
-                <a14:useLocalDpi xmlns:a14="http://schemas.microsoft.com/office/drawing/2010/main" val="0"/>
-              </a:ext>
-            </a:extLst>
-          </a:blip>
+          <a:blip r:embed="rId2"/>
           <a:stretch>
             <a:fillRect/>
           </a:stretch>
         </p:blipFill>
         <p:spPr>
           <a:xfrm>
-            <a:off x="303992" y="1690688"/>
-            <a:ext cx="5792008" cy="5010849"/>
-          </a:xfrm>
-          <a:prstGeom prst="rect">
-            <a:avLst/>
-          </a:prstGeom>
-        </p:spPr>
-      </p:pic>
-      <p:pic>
-        <p:nvPicPr>
-          <p:cNvPr id="9" name="Picture 8">
-            <a:extLst>
-              <a:ext uri="{FF2B5EF4-FFF2-40B4-BE49-F238E27FC236}">
-                <a16:creationId xmlns:a16="http://schemas.microsoft.com/office/drawing/2014/main" id="{D1DEEA5B-1535-4473-9CCB-FA5C7D66D56F}"/>
-              </a:ext>
-            </a:extLst>
-          </p:cNvPr>
-          <p:cNvPicPr>
-            <a:picLocks noChangeAspect="1"/>
-          </p:cNvPicPr>
-          <p:nvPr/>
-        </p:nvPicPr>
-        <p:blipFill>
-          <a:blip r:embed="rId3">
-            <a:extLst>
-              <a:ext uri="{28A0092B-C50C-407E-A947-70E740481C1C}">
-                <a14:useLocalDpi xmlns:a14="http://schemas.microsoft.com/office/drawing/2010/main" val="0"/>
-              </a:ext>
-            </a:extLst>
-          </a:blip>
-          <a:stretch>
-            <a:fillRect/>
-          </a:stretch>
-        </p:blipFill>
-        <p:spPr>
-          <a:xfrm>
-            <a:off x="6465261" y="1690688"/>
-            <a:ext cx="5525271" cy="5010850"/>
+            <a:off x="3692422" y="229900"/>
+            <a:ext cx="4797260" cy="2964254"/>
           </a:xfrm>
           <a:prstGeom prst="rect">
             <a:avLst/>
@@ -4986,7 +5973,218 @@
     </p:spTree>
     <p:extLst>
       <p:ext uri="{BB962C8B-B14F-4D97-AF65-F5344CB8AC3E}">
-        <p14:creationId xmlns:p14="http://schemas.microsoft.com/office/powerpoint/2010/main" val="764429502"/>
+        <p14:creationId xmlns:p14="http://schemas.microsoft.com/office/powerpoint/2010/main" val="4226754807"/>
+      </p:ext>
+    </p:extLst>
+  </p:cSld>
+  <p:clrMapOvr>
+    <a:masterClrMapping/>
+  </p:clrMapOvr>
+</p:sld>
+</file>
+
+<file path=ppt/slides/slide9.xml><?xml version="1.0" encoding="utf-8"?>
+<p:sld xmlns:a="http://schemas.openxmlformats.org/drawingml/2006/main" xmlns:r="http://schemas.openxmlformats.org/officeDocument/2006/relationships" xmlns:p="http://schemas.openxmlformats.org/presentationml/2006/main">
+  <p:cSld>
+    <p:spTree>
+      <p:nvGrpSpPr>
+        <p:cNvPr id="1" name=""/>
+        <p:cNvGrpSpPr/>
+        <p:nvPr/>
+      </p:nvGrpSpPr>
+      <p:grpSpPr>
+        <a:xfrm>
+          <a:off x="0" y="0"/>
+          <a:ext cx="0" cy="0"/>
+          <a:chOff x="0" y="0"/>
+          <a:chExt cx="0" cy="0"/>
+        </a:xfrm>
+      </p:grpSpPr>
+      <p:sp>
+        <p:nvSpPr>
+          <p:cNvPr id="5" name="Rectangle 4">
+            <a:extLst>
+              <a:ext uri="{FF2B5EF4-FFF2-40B4-BE49-F238E27FC236}">
+                <a16:creationId xmlns:a16="http://schemas.microsoft.com/office/drawing/2014/main" id="{3942A09A-8443-0073-8F1A-365D98094D54}"/>
+              </a:ext>
+            </a:extLst>
+          </p:cNvPr>
+          <p:cNvSpPr/>
+          <p:nvPr/>
+        </p:nvSpPr>
+        <p:spPr>
+          <a:xfrm>
+            <a:off x="0" y="0"/>
+            <a:ext cx="12192000" cy="6858000"/>
+          </a:xfrm>
+          <a:prstGeom prst="rect">
+            <a:avLst/>
+          </a:prstGeom>
+        </p:spPr>
+        <p:style>
+          <a:lnRef idx="0">
+            <a:schemeClr val="accent2"/>
+          </a:lnRef>
+          <a:fillRef idx="3">
+            <a:schemeClr val="accent2"/>
+          </a:fillRef>
+          <a:effectRef idx="3">
+            <a:schemeClr val="accent2"/>
+          </a:effectRef>
+          <a:fontRef idx="minor">
+            <a:schemeClr val="lt1"/>
+          </a:fontRef>
+        </p:style>
+        <p:txBody>
+          <a:bodyPr lIns="91440" tIns="45720" rIns="91440" bIns="45720" rtlCol="0" anchor="ctr"/>
+          <a:lstStyle/>
+          <a:p>
+            <a:pPr algn="ctr"/>
+            <a:endParaRPr lang="en-GB" dirty="0">
+              <a:ea typeface="Calibri"/>
+              <a:cs typeface="Calibri"/>
+            </a:endParaRPr>
+          </a:p>
+        </p:txBody>
+      </p:sp>
+      <p:pic>
+        <p:nvPicPr>
+          <p:cNvPr id="6" name="Content Placeholder 5" descr="A computer screen shot of text&#10;&#10;AI-generated content may be incorrect.">
+            <a:extLst>
+              <a:ext uri="{FF2B5EF4-FFF2-40B4-BE49-F238E27FC236}">
+                <a16:creationId xmlns:a16="http://schemas.microsoft.com/office/drawing/2014/main" id="{307A9F49-B08F-21F1-C5B3-BA7B4D925900}"/>
+              </a:ext>
+            </a:extLst>
+          </p:cNvPr>
+          <p:cNvPicPr>
+            <a:picLocks noGrp="1" noChangeAspect="1"/>
+          </p:cNvPicPr>
+          <p:nvPr>
+            <p:ph idx="1"/>
+          </p:nvPr>
+        </p:nvPicPr>
+        <p:blipFill>
+          <a:blip r:embed="rId2"/>
+          <a:srcRect r="20000"/>
+          <a:stretch>
+            <a:fillRect/>
+          </a:stretch>
+        </p:blipFill>
+        <p:spPr>
+          <a:xfrm>
+            <a:off x="170707" y="153194"/>
+            <a:ext cx="5466607" cy="6310745"/>
+          </a:xfrm>
+          <a:prstGeom prst="rect">
+            <a:avLst/>
+          </a:prstGeom>
+        </p:spPr>
+      </p:pic>
+      <p:sp>
+        <p:nvSpPr>
+          <p:cNvPr id="8" name="TextBox 7">
+            <a:extLst>
+              <a:ext uri="{FF2B5EF4-FFF2-40B4-BE49-F238E27FC236}">
+                <a16:creationId xmlns:a16="http://schemas.microsoft.com/office/drawing/2014/main" id="{5ED57B22-4753-BACB-522C-D65CF85532EF}"/>
+              </a:ext>
+            </a:extLst>
+          </p:cNvPr>
+          <p:cNvSpPr txBox="1"/>
+          <p:nvPr/>
+        </p:nvSpPr>
+        <p:spPr>
+          <a:xfrm>
+            <a:off x="5977246" y="207817"/>
+            <a:ext cx="6006935" cy="5909310"/>
+          </a:xfrm>
+          <a:prstGeom prst="rect">
+            <a:avLst/>
+          </a:prstGeom>
+          <a:noFill/>
+        </p:spPr>
+        <p:txBody>
+          <a:bodyPr rot="0" spcFirstLastPara="0" vertOverflow="overflow" horzOverflow="overflow" vert="horz" wrap="square" lIns="91440" tIns="45720" rIns="91440" bIns="45720" numCol="1" spcCol="0" rtlCol="0" fromWordArt="0" anchor="t" anchorCtr="0" forceAA="0" compatLnSpc="1">
+            <a:prstTxWarp prst="textNoShape">
+              <a:avLst/>
+            </a:prstTxWarp>
+            <a:spAutoFit/>
+          </a:bodyPr>
+          <a:lstStyle/>
+          <a:p>
+            <a:r>
+              <a:rPr lang="en-GB" sz="2700" dirty="0">
+                <a:ea typeface="Calibri"/>
+                <a:cs typeface="Calibri"/>
+              </a:rPr>
+              <a:t>Next we will create are base, this is what we are putting are decorators on.</a:t>
+            </a:r>
+          </a:p>
+          <a:p>
+            <a:endParaRPr lang="en-GB" sz="2700" dirty="0">
+              <a:ea typeface="Calibri"/>
+              <a:cs typeface="Calibri"/>
+            </a:endParaRPr>
+          </a:p>
+          <a:p>
+            <a:r>
+              <a:rPr lang="en-GB" sz="2700" dirty="0">
+                <a:ea typeface="Calibri"/>
+                <a:cs typeface="Calibri"/>
+              </a:rPr>
+              <a:t>We do this by inheriting from are interface and using that as a contract to say what are object should be, then we add the </a:t>
+            </a:r>
+            <a:r>
+              <a:rPr lang="en-GB" sz="2700">
+                <a:ea typeface="Calibri"/>
+                <a:cs typeface="Calibri"/>
+              </a:rPr>
+              <a:t>functionality that we want it to have.</a:t>
+            </a:r>
+            <a:endParaRPr lang="en-GB" sz="2700" dirty="0">
+              <a:ea typeface="Calibri"/>
+              <a:cs typeface="Calibri"/>
+            </a:endParaRPr>
+          </a:p>
+          <a:p>
+            <a:endParaRPr lang="en-GB" sz="2700" dirty="0">
+              <a:ea typeface="Calibri"/>
+              <a:cs typeface="Calibri"/>
+            </a:endParaRPr>
+          </a:p>
+          <a:p>
+            <a:r>
+              <a:rPr lang="en-GB" sz="2700" dirty="0">
+                <a:ea typeface="Calibri"/>
+                <a:cs typeface="Calibri"/>
+              </a:rPr>
+              <a:t>We also need the base to be able to store a object that is the same data type as are interface.</a:t>
+            </a:r>
+          </a:p>
+          <a:p>
+            <a:endParaRPr lang="en-GB" sz="2700" dirty="0">
+              <a:ea typeface="Calibri"/>
+              <a:cs typeface="Calibri"/>
+            </a:endParaRPr>
+          </a:p>
+          <a:p>
+            <a:r>
+              <a:rPr lang="en-GB" sz="2700">
+                <a:ea typeface="Calibri"/>
+                <a:cs typeface="Calibri"/>
+              </a:rPr>
+              <a:t>We do this so we can keep adding layers.</a:t>
+            </a:r>
+            <a:endParaRPr lang="en-GB" sz="2700" dirty="0">
+              <a:ea typeface="Calibri"/>
+              <a:cs typeface="Calibri"/>
+            </a:endParaRPr>
+          </a:p>
+        </p:txBody>
+      </p:sp>
+    </p:spTree>
+    <p:extLst>
+      <p:ext uri="{BB962C8B-B14F-4D97-AF65-F5344CB8AC3E}">
+        <p14:creationId xmlns:p14="http://schemas.microsoft.com/office/powerpoint/2010/main" val="921057955"/>
       </p:ext>
     </p:extLst>
   </p:cSld>
